--- a/000pr.exe.pptx
+++ b/000pr.exe.pptx
@@ -23,26 +23,26 @@
   <p:notesSz cx="5143500" cy="9144000"/>
   <p:embeddedFontLst>
     <p:embeddedFont>
+      <p:font typeface="Gelasio" panose="020B0604020202020204" charset="0"/>
+      <p:regular r:id="rId13"/>
+    </p:embeddedFont>
+    <p:embeddedFont>
+      <p:font typeface="Consolas" panose="020B0609020204030204" pitchFamily="49" charset="0"/>
+      <p:regular r:id="rId14"/>
+      <p:bold r:id="rId15"/>
+      <p:italic r:id="rId16"/>
+      <p:boldItalic r:id="rId17"/>
+    </p:embeddedFont>
+    <p:embeddedFont>
       <p:font typeface="Calibri" panose="020F0502020204030204" pitchFamily="34" charset="0"/>
-      <p:regular r:id="rId13"/>
-      <p:bold r:id="rId14"/>
-      <p:italic r:id="rId15"/>
-      <p:boldItalic r:id="rId16"/>
+      <p:regular r:id="rId18"/>
+      <p:bold r:id="rId19"/>
+      <p:italic r:id="rId20"/>
+      <p:boldItalic r:id="rId21"/>
     </p:embeddedFont>
     <p:embeddedFont>
       <p:font typeface="Lato" panose="020B0604020202020204" charset="0"/>
-      <p:regular r:id="rId17"/>
-    </p:embeddedFont>
-    <p:embeddedFont>
-      <p:font typeface="Gelasio" panose="020B0604020202020204" charset="0"/>
-      <p:regular r:id="rId18"/>
-    </p:embeddedFont>
-    <p:embeddedFont>
-      <p:font typeface="Consolas" panose="020B0609020204030204" pitchFamily="49" charset="0"/>
-      <p:regular r:id="rId19"/>
-      <p:bold r:id="rId20"/>
-      <p:italic r:id="rId21"/>
-      <p:boldItalic r:id="rId22"/>
+      <p:regular r:id="rId22"/>
     </p:embeddedFont>
   </p:embeddedFontLst>
   <p:defaultTextStyle>
@@ -139,7 +139,7 @@
   </p:defaultTextStyle>
   <p:extLst>
     <p:ext uri="{EFAFB233-063F-42B5-8137-9DF3F51BA10A}">
-      <p15:sldGuideLst xmlns:p15="http://schemas.microsoft.com/office/powerpoint/2012/main" xmlns="">
+      <p15:sldGuideLst xmlns="" xmlns:p15="http://schemas.microsoft.com/office/powerpoint/2012/main">
         <p15:guide id="1" orient="horz" pos="1620">
           <p15:clr>
             <a:srgbClr val="A4A3A4"/>
@@ -238,7 +238,7 @@
           <a:p>
             <a:fld id="{D60A1728-454F-490E-A24E-499005BEE4B1}" type="datetimeFigureOut">
               <a:rPr lang="ru-RU" smtClean="0"/>
-              <a:t>14.06.2026</a:t>
+              <a:t>16.06.2026</a:t>
             </a:fld>
             <a:endParaRPr lang="ru-RU"/>
           </a:p>
@@ -1858,7 +1858,7 @@
           <p:cNvPr id="8" name="TextBox 7">
             <a:extLst>
               <a:ext uri="{FF2B5EF4-FFF2-40B4-BE49-F238E27FC236}">
-                <a16:creationId xmlns:a16="http://schemas.microsoft.com/office/drawing/2014/main" xmlns="" id="{6324B486-8A66-4B40-8C3A-8877E9C41E35}"/>
+                <a16:creationId xmlns="" xmlns:a16="http://schemas.microsoft.com/office/drawing/2014/main" id="{6324B486-8A66-4B40-8C3A-8877E9C41E35}"/>
               </a:ext>
             </a:extLst>
           </p:cNvPr>
@@ -1894,7 +1894,7 @@
           <p:cNvPr id="9" name="TextBox 8">
             <a:extLst>
               <a:ext uri="{FF2B5EF4-FFF2-40B4-BE49-F238E27FC236}">
-                <a16:creationId xmlns:a16="http://schemas.microsoft.com/office/drawing/2014/main" xmlns="" id="{6F516F2A-9A27-408B-9633-31C52D01FD1A}"/>
+                <a16:creationId xmlns="" xmlns:a16="http://schemas.microsoft.com/office/drawing/2014/main" id="{6F516F2A-9A27-408B-9633-31C52D01FD1A}"/>
               </a:ext>
             </a:extLst>
           </p:cNvPr>
@@ -2174,8 +2174,12 @@
               <a:t> Без официальных обновлений система остается уязвимой для новых </a:t>
             </a:r>
             <a:r>
-              <a:rPr lang="ru-RU" sz="1000" dirty="0" err="1"/>
+              <a:rPr lang="ru-RU" sz="1000" dirty="0" err="1" smtClean="0"/>
               <a:t>киберугроз</a:t>
+            </a:r>
+            <a:r>
+              <a:rPr lang="ru-RU" sz="1000" dirty="0" smtClean="0"/>
+              <a:t>.</a:t>
             </a:r>
             <a:endParaRPr lang="ru-RU" sz="1000" dirty="0"/>
           </a:p>
@@ -2936,55 +2940,22 @@
           </a:bodyPr>
           <a:lstStyle/>
           <a:p>
-            <a:pPr marL="0" indent="0" algn="l">
+            <a:pPr>
               <a:lnSpc>
                 <a:spcPct val="133000"/>
               </a:lnSpc>
-              <a:buNone/>
             </a:pPr>
             <a:r>
-              <a:rPr lang="en-US" sz="1100" dirty="0">
-                <a:solidFill>
-                  <a:srgbClr val="272525"/>
-                </a:solidFill>
-                <a:latin typeface="Lato" pitchFamily="34" charset="0"/>
-                <a:ea typeface="Lato" pitchFamily="34" charset="-122"/>
-                <a:cs typeface="Lato" pitchFamily="34" charset="-120"/>
-              </a:rPr>
-              <a:t>Провести комплексный анализ рисков при использовании </a:t>
-            </a:r>
-            <a:r>
-              <a:rPr lang="en-US" sz="1100" dirty="0" err="1">
-                <a:solidFill>
-                  <a:srgbClr val="272525"/>
-                </a:solidFill>
-                <a:latin typeface="Lato" pitchFamily="34" charset="0"/>
-                <a:ea typeface="Lato" pitchFamily="34" charset="-122"/>
-                <a:cs typeface="Lato" pitchFamily="34" charset="-120"/>
-              </a:rPr>
-              <a:t>пиратского</a:t>
-            </a:r>
-            <a:r>
-              <a:rPr lang="en-US" sz="1100" dirty="0">
-                <a:solidFill>
-                  <a:srgbClr val="272525"/>
-                </a:solidFill>
-                <a:latin typeface="Lato" pitchFamily="34" charset="0"/>
-                <a:ea typeface="Lato" pitchFamily="34" charset="-122"/>
-                <a:cs typeface="Lato" pitchFamily="34" charset="-120"/>
-              </a:rPr>
-              <a:t> ПО</a:t>
-            </a:r>
-            <a:r>
-              <a:rPr lang="ru-RU" sz="1100" dirty="0">
-                <a:solidFill>
-                  <a:srgbClr val="272525"/>
-                </a:solidFill>
-                <a:latin typeface="Lato" pitchFamily="34" charset="0"/>
-                <a:ea typeface="Lato" pitchFamily="34" charset="-122"/>
-                <a:cs typeface="Lato" pitchFamily="34" charset="-120"/>
-              </a:rPr>
-              <a:t>, оценить угрозы.</a:t>
+              <a:rPr lang="ru-RU" sz="1100" dirty="0"/>
+              <a:t>П</a:t>
+            </a:r>
+            <a:r>
+              <a:rPr lang="ru-RU" sz="1100" dirty="0" smtClean="0"/>
+              <a:t>ровести </a:t>
+            </a:r>
+            <a:r>
+              <a:rPr lang="ru-RU" sz="1100" dirty="0"/>
+              <a:t>комплексный анализ безопасности пиратского программного обеспечения и механизмы его защиты, оценить сопутствующие угрозы.</a:t>
             </a:r>
             <a:endParaRPr lang="en-US" sz="1100" dirty="0"/>
           </a:p>
@@ -3340,7 +3311,7 @@
           <a:blip r:embed="rId3">
             <a:extLst>
               <a:ext uri="{96DAC541-7B7A-43D3-8B79-37D633B846F1}">
-                <asvg:svgBlip xmlns:asvg="http://schemas.microsoft.com/office/drawing/2016/SVG/main" xmlns="" r:embed="rId4"/>
+                <asvg:svgBlip xmlns="" xmlns:asvg="http://schemas.microsoft.com/office/drawing/2016/SVG/main" r:embed="rId4"/>
               </a:ext>
             </a:extLst>
           </a:blip>
@@ -3480,7 +3451,51 @@
                 <a:ea typeface="Lato" pitchFamily="34" charset="-122"/>
                 <a:cs typeface="Lato" pitchFamily="34" charset="-120"/>
               </a:rPr>
-              <a:t>Самая известная система защиты. Шифрует исполняемый код, проверяет целостность файлов в реальном времени</a:t>
+              <a:t>Самая известная система защиты. Шифрует исполняемый код, проверяет целостность файлов в </a:t>
+            </a:r>
+            <a:r>
+              <a:rPr lang="en-US" sz="1100" dirty="0" err="1">
+                <a:solidFill>
+                  <a:srgbClr val="272525"/>
+                </a:solidFill>
+                <a:latin typeface="Lato" pitchFamily="34" charset="0"/>
+                <a:ea typeface="Lato" pitchFamily="34" charset="-122"/>
+                <a:cs typeface="Lato" pitchFamily="34" charset="-120"/>
+              </a:rPr>
+              <a:t>реальном</a:t>
+            </a:r>
+            <a:r>
+              <a:rPr lang="en-US" sz="1100" dirty="0">
+                <a:solidFill>
+                  <a:srgbClr val="272525"/>
+                </a:solidFill>
+                <a:latin typeface="Lato" pitchFamily="34" charset="0"/>
+                <a:ea typeface="Lato" pitchFamily="34" charset="-122"/>
+                <a:cs typeface="Lato" pitchFamily="34" charset="-120"/>
+              </a:rPr>
+              <a:t> </a:t>
+            </a:r>
+            <a:r>
+              <a:rPr lang="en-US" sz="1100" dirty="0" err="1" smtClean="0">
+                <a:solidFill>
+                  <a:srgbClr val="272525"/>
+                </a:solidFill>
+                <a:latin typeface="Lato" pitchFamily="34" charset="0"/>
+                <a:ea typeface="Lato" pitchFamily="34" charset="-122"/>
+                <a:cs typeface="Lato" pitchFamily="34" charset="-120"/>
+              </a:rPr>
+              <a:t>времени</a:t>
+            </a:r>
+            <a:r>
+              <a:rPr lang="ru-RU" sz="1100" dirty="0" smtClean="0">
+                <a:solidFill>
+                  <a:srgbClr val="272525"/>
+                </a:solidFill>
+                <a:latin typeface="Lato" pitchFamily="34" charset="0"/>
+                <a:ea typeface="Lato" pitchFamily="34" charset="-122"/>
+                <a:cs typeface="Lato" pitchFamily="34" charset="-120"/>
+              </a:rPr>
+              <a:t>.</a:t>
             </a:r>
             <a:endParaRPr lang="en-US" sz="1100" dirty="0"/>
           </a:p>
@@ -3498,7 +3513,7 @@
           <a:blip r:embed="rId3">
             <a:extLst>
               <a:ext uri="{96DAC541-7B7A-43D3-8B79-37D633B846F1}">
-                <asvg:svgBlip xmlns:asvg="http://schemas.microsoft.com/office/drawing/2016/SVG/main" xmlns="" r:embed="rId4"/>
+                <asvg:svgBlip xmlns="" xmlns:asvg="http://schemas.microsoft.com/office/drawing/2016/SVG/main" r:embed="rId4"/>
               </a:ext>
             </a:extLst>
           </a:blip>
@@ -3609,7 +3624,7 @@
         <p:spPr>
           <a:xfrm>
             <a:off x="3421410" y="2733824"/>
-            <a:ext cx="2301106" cy="907256"/>
+            <a:ext cx="2301106" cy="1103238"/>
           </a:xfrm>
           <a:prstGeom prst="rect">
             <a:avLst/>
@@ -3619,7 +3634,7 @@
         </p:spPr>
         <p:txBody>
           <a:bodyPr wrap="square" lIns="0" tIns="0" rIns="0" bIns="0" rtlCol="0" anchor="t">
-            <a:normAutofit/>
+            <a:normAutofit lnSpcReduction="10000"/>
           </a:bodyPr>
           <a:lstStyle/>
           <a:p>
@@ -3638,7 +3653,84 @@
                 <a:ea typeface="Lato" pitchFamily="34" charset="-122"/>
                 <a:cs typeface="Lato" pitchFamily="34" charset="-120"/>
               </a:rPr>
-              <a:t>Лицензия привязывается к «железу» компьютера (CPU, GPU, материнская плата). Перенос на другой ПК блокирует ПО</a:t>
+              <a:t>Лицензия привязывается к </a:t>
+            </a:r>
+            <a:r>
+              <a:rPr lang="ru-RU" sz="1100" dirty="0" smtClean="0">
+                <a:solidFill>
+                  <a:srgbClr val="272525"/>
+                </a:solidFill>
+                <a:latin typeface="Lato" pitchFamily="34" charset="0"/>
+                <a:ea typeface="Lato" pitchFamily="34" charset="-122"/>
+                <a:cs typeface="Lato" pitchFamily="34" charset="-120"/>
+              </a:rPr>
+              <a:t>аппаратному обеспечению</a:t>
+            </a:r>
+            <a:r>
+              <a:rPr lang="en-US" sz="1100" dirty="0" smtClean="0">
+                <a:solidFill>
+                  <a:srgbClr val="272525"/>
+                </a:solidFill>
+                <a:latin typeface="Lato" pitchFamily="34" charset="0"/>
+                <a:ea typeface="Lato" pitchFamily="34" charset="-122"/>
+                <a:cs typeface="Lato" pitchFamily="34" charset="-120"/>
+              </a:rPr>
+              <a:t> </a:t>
+            </a:r>
+            <a:r>
+              <a:rPr lang="en-US" sz="1100" dirty="0">
+                <a:solidFill>
+                  <a:srgbClr val="272525"/>
+                </a:solidFill>
+                <a:latin typeface="Lato" pitchFamily="34" charset="0"/>
+                <a:ea typeface="Lato" pitchFamily="34" charset="-122"/>
+                <a:cs typeface="Lato" pitchFamily="34" charset="-120"/>
+              </a:rPr>
+              <a:t>компьютера (CPU, GPU, материнская плата). Перенос на другой ПК </a:t>
+            </a:r>
+            <a:r>
+              <a:rPr lang="en-US" sz="1100" dirty="0" err="1">
+                <a:solidFill>
+                  <a:srgbClr val="272525"/>
+                </a:solidFill>
+                <a:latin typeface="Lato" pitchFamily="34" charset="0"/>
+                <a:ea typeface="Lato" pitchFamily="34" charset="-122"/>
+                <a:cs typeface="Lato" pitchFamily="34" charset="-120"/>
+              </a:rPr>
+              <a:t>блокирует</a:t>
+            </a:r>
+            <a:r>
+              <a:rPr lang="en-US" sz="1100" dirty="0">
+                <a:solidFill>
+                  <a:srgbClr val="272525"/>
+                </a:solidFill>
+                <a:latin typeface="Lato" pitchFamily="34" charset="0"/>
+                <a:ea typeface="Lato" pitchFamily="34" charset="-122"/>
+                <a:cs typeface="Lato" pitchFamily="34" charset="-120"/>
+              </a:rPr>
+              <a:t> </a:t>
+            </a:r>
+            <a:r>
+              <a:rPr lang="en-US" sz="1100" dirty="0" smtClean="0">
+                <a:solidFill>
+                  <a:srgbClr val="272525"/>
+                </a:solidFill>
+                <a:latin typeface="Lato" pitchFamily="34" charset="0"/>
+                <a:ea typeface="Lato" pitchFamily="34" charset="-122"/>
+                <a:cs typeface="Lato" pitchFamily="34" charset="-120"/>
+              </a:rPr>
+              <a:t>ПО</a:t>
+            </a:r>
+            <a:r>
+              <a:rPr lang="ru-RU" sz="1100" dirty="0" smtClean="0">
+                <a:solidFill>
+                  <a:srgbClr val="272525"/>
+                </a:solidFill>
+                <a:latin typeface="Lato" pitchFamily="34" charset="0"/>
+                <a:ea typeface="Lato" pitchFamily="34" charset="-122"/>
+                <a:cs typeface="Lato" pitchFamily="34" charset="-120"/>
+              </a:rPr>
+              <a:t>.</a:t>
             </a:r>
             <a:endParaRPr lang="en-US" sz="1100" dirty="0"/>
           </a:p>
@@ -3656,7 +3748,7 @@
           <a:blip r:embed="rId3">
             <a:extLst>
               <a:ext uri="{96DAC541-7B7A-43D3-8B79-37D633B846F1}">
-                <asvg:svgBlip xmlns:asvg="http://schemas.microsoft.com/office/drawing/2016/SVG/main" xmlns="" r:embed="rId4"/>
+                <asvg:svgBlip xmlns="" xmlns:asvg="http://schemas.microsoft.com/office/drawing/2016/SVG/main" r:embed="rId4"/>
               </a:ext>
             </a:extLst>
           </a:blip>
@@ -3766,8 +3858,8 @@
         </p:nvSpPr>
         <p:spPr>
           <a:xfrm>
-            <a:off x="6185892" y="2733824"/>
-            <a:ext cx="2301106" cy="1134070"/>
+            <a:off x="6185891" y="2733824"/>
+            <a:ext cx="2402631" cy="1134070"/>
           </a:xfrm>
           <a:prstGeom prst="rect">
             <a:avLst/>
@@ -3796,7 +3888,73 @@
                 <a:ea typeface="Lato" pitchFamily="34" charset="-122"/>
                 <a:cs typeface="Lato" pitchFamily="34" charset="-120"/>
               </a:rPr>
-              <a:t>Динамические проверки: программа в случайные моменты времени проверяет, не взломана ли она. Обнаружение — блокировка</a:t>
+              <a:t>Динамические проверки: программа в случайные моменты времени проверяет, не взломана ли она. </a:t>
+            </a:r>
+            <a:r>
+              <a:rPr lang="en-US" sz="1100" dirty="0" err="1">
+                <a:solidFill>
+                  <a:srgbClr val="272525"/>
+                </a:solidFill>
+                <a:latin typeface="Lato" pitchFamily="34" charset="0"/>
+                <a:ea typeface="Lato" pitchFamily="34" charset="-122"/>
+                <a:cs typeface="Lato" pitchFamily="34" charset="-120"/>
+              </a:rPr>
+              <a:t>Обнаружение</a:t>
+            </a:r>
+            <a:r>
+              <a:rPr lang="en-US" sz="1100" dirty="0">
+                <a:solidFill>
+                  <a:srgbClr val="272525"/>
+                </a:solidFill>
+                <a:latin typeface="Lato" pitchFamily="34" charset="0"/>
+                <a:ea typeface="Lato" pitchFamily="34" charset="-122"/>
+                <a:cs typeface="Lato" pitchFamily="34" charset="-120"/>
+              </a:rPr>
+              <a:t> </a:t>
+            </a:r>
+            <a:r>
+              <a:rPr lang="en-US" sz="1100" dirty="0" smtClean="0">
+                <a:solidFill>
+                  <a:srgbClr val="272525"/>
+                </a:solidFill>
+                <a:latin typeface="Lato" pitchFamily="34" charset="0"/>
+                <a:ea typeface="Lato" pitchFamily="34" charset="-122"/>
+                <a:cs typeface="Lato" pitchFamily="34" charset="-120"/>
+              </a:rPr>
+              <a:t>—</a:t>
+            </a:r>
+            <a:r>
+              <a:rPr lang="ru-RU" sz="1100" dirty="0" smtClean="0">
+                <a:solidFill>
+                  <a:srgbClr val="272525"/>
+                </a:solidFill>
+                <a:latin typeface="Lato" pitchFamily="34" charset="0"/>
+                <a:ea typeface="Lato" pitchFamily="34" charset="-122"/>
+                <a:cs typeface="Lato" pitchFamily="34" charset="-120"/>
+              </a:rPr>
+              <a:t> </a:t>
+            </a:r>
+            <a:r>
+              <a:rPr lang="en-US" sz="1100" dirty="0" err="1" smtClean="0">
+                <a:solidFill>
+                  <a:srgbClr val="272525"/>
+                </a:solidFill>
+                <a:latin typeface="Lato" pitchFamily="34" charset="0"/>
+                <a:ea typeface="Lato" pitchFamily="34" charset="-122"/>
+                <a:cs typeface="Lato" pitchFamily="34" charset="-120"/>
+              </a:rPr>
+              <a:t>блокировка</a:t>
+            </a:r>
+            <a:r>
+              <a:rPr lang="ru-RU" sz="1100" dirty="0" smtClean="0">
+                <a:solidFill>
+                  <a:srgbClr val="272525"/>
+                </a:solidFill>
+                <a:latin typeface="Lato" pitchFamily="34" charset="0"/>
+                <a:ea typeface="Lato" pitchFamily="34" charset="-122"/>
+                <a:cs typeface="Lato" pitchFamily="34" charset="-120"/>
+              </a:rPr>
+              <a:t>.</a:t>
             </a:r>
             <a:endParaRPr lang="en-US" sz="1100" dirty="0"/>
           </a:p>
@@ -3930,7 +4088,7 @@
           <a:blip r:embed="rId3">
             <a:extLst>
               <a:ext uri="{96DAC541-7B7A-43D3-8B79-37D633B846F1}">
-                <asvg:svgBlip xmlns:asvg="http://schemas.microsoft.com/office/drawing/2016/SVG/main" xmlns="" r:embed="rId4"/>
+                <asvg:svgBlip xmlns="" xmlns:asvg="http://schemas.microsoft.com/office/drawing/2016/SVG/main" r:embed="rId4"/>
               </a:ext>
             </a:extLst>
           </a:blip>
@@ -4028,7 +4186,29 @@
                 <a:ea typeface="Lato" pitchFamily="34" charset="-122"/>
                 <a:cs typeface="Lato" pitchFamily="34" charset="-120"/>
               </a:rPr>
-              <a:t>Крадут пароли, cookies, данные банковских карт из браузеров и мессенджеров</a:t>
+              <a:t>Крадут пароли, cookies, данные банковских карт из браузеров и </a:t>
+            </a:r>
+            <a:r>
+              <a:rPr lang="en-US" sz="1100" dirty="0" err="1" smtClean="0">
+                <a:solidFill>
+                  <a:srgbClr val="272525"/>
+                </a:solidFill>
+                <a:latin typeface="Lato" pitchFamily="34" charset="0"/>
+                <a:ea typeface="Lato" pitchFamily="34" charset="-122"/>
+                <a:cs typeface="Lato" pitchFamily="34" charset="-120"/>
+              </a:rPr>
+              <a:t>мессенджеров</a:t>
+            </a:r>
+            <a:r>
+              <a:rPr lang="ru-RU" sz="1100" dirty="0" smtClean="0">
+                <a:solidFill>
+                  <a:srgbClr val="272525"/>
+                </a:solidFill>
+                <a:latin typeface="Lato" pitchFamily="34" charset="0"/>
+                <a:ea typeface="Lato" pitchFamily="34" charset="-122"/>
+                <a:cs typeface="Lato" pitchFamily="34" charset="-120"/>
+              </a:rPr>
+              <a:t>.</a:t>
             </a:r>
             <a:endParaRPr lang="en-US" sz="1100" dirty="0"/>
           </a:p>
@@ -4095,7 +4275,7 @@
           <a:blip r:embed="rId5">
             <a:extLst>
               <a:ext uri="{96DAC541-7B7A-43D3-8B79-37D633B846F1}">
-                <asvg:svgBlip xmlns:asvg="http://schemas.microsoft.com/office/drawing/2016/SVG/main" xmlns="" r:embed="rId6"/>
+                <asvg:svgBlip xmlns="" xmlns:asvg="http://schemas.microsoft.com/office/drawing/2016/SVG/main" r:embed="rId6"/>
               </a:ext>
             </a:extLst>
           </a:blip>
@@ -4193,7 +4373,18 @@
                 <a:ea typeface="Lato" pitchFamily="34" charset="-122"/>
                 <a:cs typeface="Lato" pitchFamily="34" charset="-120"/>
               </a:rPr>
-              <a:t>Используют GPU/CPU жертвы для добычи криптовалюты — компьютер тормозит</a:t>
+              <a:t>Используют GPU/CPU жертвы для добычи криптовалюты — </a:t>
+            </a:r>
+            <a:r>
+              <a:rPr lang="ru-RU" sz="1100" dirty="0" smtClean="0">
+                <a:solidFill>
+                  <a:srgbClr val="272525"/>
+                </a:solidFill>
+                <a:latin typeface="Lato" pitchFamily="34" charset="0"/>
+                <a:ea typeface="Lato" pitchFamily="34" charset="-122"/>
+                <a:cs typeface="Lato" pitchFamily="34" charset="-120"/>
+              </a:rPr>
+              <a:t>снижает производительность системы.</a:t>
             </a:r>
             <a:endParaRPr lang="en-US" sz="1100" dirty="0"/>
           </a:p>
@@ -4260,7 +4451,7 @@
           <a:blip r:embed="rId7">
             <a:extLst>
               <a:ext uri="{96DAC541-7B7A-43D3-8B79-37D633B846F1}">
-                <asvg:svgBlip xmlns:asvg="http://schemas.microsoft.com/office/drawing/2016/SVG/main" xmlns="" r:embed="rId8"/>
+                <asvg:svgBlip xmlns="" xmlns:asvg="http://schemas.microsoft.com/office/drawing/2016/SVG/main" r:embed="rId8"/>
               </a:ext>
             </a:extLst>
           </a:blip>
@@ -4358,7 +4549,29 @@
                 <a:ea typeface="Lato" pitchFamily="34" charset="-122"/>
                 <a:cs typeface="Lato" pitchFamily="34" charset="-120"/>
               </a:rPr>
-              <a:t>Remote Access Trojan — полный контроль над ПК: камера, микрофон, файлы</a:t>
+              <a:t>Remote Access Trojan — полный контроль над ПК: камера, микрофон, </a:t>
+            </a:r>
+            <a:r>
+              <a:rPr lang="en-US" sz="1100" dirty="0" err="1" smtClean="0">
+                <a:solidFill>
+                  <a:srgbClr val="272525"/>
+                </a:solidFill>
+                <a:latin typeface="Lato" pitchFamily="34" charset="0"/>
+                <a:ea typeface="Lato" pitchFamily="34" charset="-122"/>
+                <a:cs typeface="Lato" pitchFamily="34" charset="-120"/>
+              </a:rPr>
+              <a:t>файлы</a:t>
+            </a:r>
+            <a:r>
+              <a:rPr lang="ru-RU" sz="1100" dirty="0" smtClean="0">
+                <a:solidFill>
+                  <a:srgbClr val="272525"/>
+                </a:solidFill>
+                <a:latin typeface="Lato" pitchFamily="34" charset="0"/>
+                <a:ea typeface="Lato" pitchFamily="34" charset="-122"/>
+                <a:cs typeface="Lato" pitchFamily="34" charset="-120"/>
+              </a:rPr>
+              <a:t>.</a:t>
             </a:r>
             <a:endParaRPr lang="en-US" sz="1100" dirty="0"/>
           </a:p>
@@ -4425,7 +4638,7 @@
           <a:blip r:embed="rId9">
             <a:extLst>
               <a:ext uri="{96DAC541-7B7A-43D3-8B79-37D633B846F1}">
-                <asvg:svgBlip xmlns:asvg="http://schemas.microsoft.com/office/drawing/2016/SVG/main" xmlns="" r:embed="rId10"/>
+                <asvg:svgBlip xmlns="" xmlns:asvg="http://schemas.microsoft.com/office/drawing/2016/SVG/main" r:embed="rId10"/>
               </a:ext>
             </a:extLst>
           </a:blip>
@@ -4523,7 +4736,51 @@
                 <a:ea typeface="Lato" pitchFamily="34" charset="-122"/>
                 <a:cs typeface="Lato" pitchFamily="34" charset="-120"/>
               </a:rPr>
-              <a:t>Шифруют файлы и требуют выкуп. Восстановление без ключа почти невозможно</a:t>
+              <a:t>Шифруют файлы и требуют выкуп. Восстановление без ключа </a:t>
+            </a:r>
+            <a:r>
+              <a:rPr lang="en-US" sz="1100" dirty="0" err="1">
+                <a:solidFill>
+                  <a:srgbClr val="272525"/>
+                </a:solidFill>
+                <a:latin typeface="Lato" pitchFamily="34" charset="0"/>
+                <a:ea typeface="Lato" pitchFamily="34" charset="-122"/>
+                <a:cs typeface="Lato" pitchFamily="34" charset="-120"/>
+              </a:rPr>
+              <a:t>почти</a:t>
+            </a:r>
+            <a:r>
+              <a:rPr lang="en-US" sz="1100" dirty="0">
+                <a:solidFill>
+                  <a:srgbClr val="272525"/>
+                </a:solidFill>
+                <a:latin typeface="Lato" pitchFamily="34" charset="0"/>
+                <a:ea typeface="Lato" pitchFamily="34" charset="-122"/>
+                <a:cs typeface="Lato" pitchFamily="34" charset="-120"/>
+              </a:rPr>
+              <a:t> </a:t>
+            </a:r>
+            <a:r>
+              <a:rPr lang="en-US" sz="1100" dirty="0" err="1" smtClean="0">
+                <a:solidFill>
+                  <a:srgbClr val="272525"/>
+                </a:solidFill>
+                <a:latin typeface="Lato" pitchFamily="34" charset="0"/>
+                <a:ea typeface="Lato" pitchFamily="34" charset="-122"/>
+                <a:cs typeface="Lato" pitchFamily="34" charset="-120"/>
+              </a:rPr>
+              <a:t>невозможно</a:t>
+            </a:r>
+            <a:r>
+              <a:rPr lang="ru-RU" sz="1100" dirty="0" smtClean="0">
+                <a:solidFill>
+                  <a:srgbClr val="272525"/>
+                </a:solidFill>
+                <a:latin typeface="Lato" pitchFamily="34" charset="0"/>
+                <a:ea typeface="Lato" pitchFamily="34" charset="-122"/>
+                <a:cs typeface="Lato" pitchFamily="34" charset="-120"/>
+              </a:rPr>
+              <a:t>.</a:t>
             </a:r>
             <a:endParaRPr lang="en-US" sz="1100" dirty="0"/>
           </a:p>
@@ -4638,7 +4895,7 @@
           <a:blip r:embed="rId4">
             <a:extLst>
               <a:ext uri="{96DAC541-7B7A-43D3-8B79-37D633B846F1}">
-                <asvg:svgBlip xmlns:asvg="http://schemas.microsoft.com/office/drawing/2016/SVG/main" xmlns="" r:embed="rId5"/>
+                <asvg:svgBlip xmlns="" xmlns:asvg="http://schemas.microsoft.com/office/drawing/2016/SVG/main" r:embed="rId5"/>
               </a:ext>
             </a:extLst>
           </a:blip>
@@ -4736,7 +4993,62 @@
                 <a:ea typeface="Lato" pitchFamily="34" charset="-122"/>
                 <a:cs typeface="Lato" pitchFamily="34" charset="-120"/>
               </a:rPr>
-              <a:t>Изменение байтов в исполняемом файле — убирают проверки лицензии и активации</a:t>
+              <a:t>Изменение байтов в исполняемом файле — </a:t>
+            </a:r>
+            <a:r>
+              <a:rPr lang="ru-RU" sz="1050" dirty="0" smtClean="0">
+                <a:solidFill>
+                  <a:srgbClr val="272525"/>
+                </a:solidFill>
+                <a:latin typeface="Lato" pitchFamily="34" charset="0"/>
+                <a:ea typeface="Lato" pitchFamily="34" charset="-122"/>
+                <a:cs typeface="Lato" pitchFamily="34" charset="-120"/>
+              </a:rPr>
+              <a:t>удаляют алгоритмы</a:t>
+            </a:r>
+            <a:r>
+              <a:rPr lang="en-US" sz="1050" dirty="0" smtClean="0">
+                <a:solidFill>
+                  <a:srgbClr val="272525"/>
+                </a:solidFill>
+                <a:latin typeface="Lato" pitchFamily="34" charset="0"/>
+                <a:ea typeface="Lato" pitchFamily="34" charset="-122"/>
+                <a:cs typeface="Lato" pitchFamily="34" charset="-120"/>
+              </a:rPr>
+              <a:t> </a:t>
+            </a:r>
+            <a:r>
+              <a:rPr lang="en-US" sz="1050" dirty="0">
+                <a:solidFill>
+                  <a:srgbClr val="272525"/>
+                </a:solidFill>
+                <a:latin typeface="Lato" pitchFamily="34" charset="0"/>
+                <a:ea typeface="Lato" pitchFamily="34" charset="-122"/>
+                <a:cs typeface="Lato" pitchFamily="34" charset="-120"/>
+              </a:rPr>
+              <a:t>проверки лицензии и </a:t>
+            </a:r>
+            <a:r>
+              <a:rPr lang="en-US" sz="1050" dirty="0" err="1" smtClean="0">
+                <a:solidFill>
+                  <a:srgbClr val="272525"/>
+                </a:solidFill>
+                <a:latin typeface="Lato" pitchFamily="34" charset="0"/>
+                <a:ea typeface="Lato" pitchFamily="34" charset="-122"/>
+                <a:cs typeface="Lato" pitchFamily="34" charset="-120"/>
+              </a:rPr>
+              <a:t>активации</a:t>
+            </a:r>
+            <a:r>
+              <a:rPr lang="ru-RU" sz="1050" dirty="0" smtClean="0">
+                <a:solidFill>
+                  <a:srgbClr val="272525"/>
+                </a:solidFill>
+                <a:latin typeface="Lato" pitchFamily="34" charset="0"/>
+                <a:ea typeface="Lato" pitchFamily="34" charset="-122"/>
+                <a:cs typeface="Lato" pitchFamily="34" charset="-120"/>
+              </a:rPr>
+              <a:t>.</a:t>
             </a:r>
             <a:endParaRPr lang="en-US" sz="1050" dirty="0"/>
           </a:p>
@@ -4754,7 +5066,7 @@
           <a:blip r:embed="rId4">
             <a:extLst>
               <a:ext uri="{96DAC541-7B7A-43D3-8B79-37D633B846F1}">
-                <asvg:svgBlip xmlns:asvg="http://schemas.microsoft.com/office/drawing/2016/SVG/main" xmlns="" r:embed="rId5"/>
+                <asvg:svgBlip xmlns="" xmlns:asvg="http://schemas.microsoft.com/office/drawing/2016/SVG/main" r:embed="rId5"/>
               </a:ext>
             </a:extLst>
           </a:blip>
@@ -4852,7 +5164,51 @@
                 <a:ea typeface="Lato" pitchFamily="34" charset="-122"/>
                 <a:cs typeface="Lato" pitchFamily="34" charset="-120"/>
               </a:rPr>
-              <a:t>Подмена DLL-файлов: программа «думает», что обращается к лицензионному серверу</a:t>
+              <a:t>Подмена DLL-файлов: программа «думает», что обращается к </a:t>
+            </a:r>
+            <a:r>
+              <a:rPr lang="en-US" sz="1050" dirty="0" err="1">
+                <a:solidFill>
+                  <a:srgbClr val="272525"/>
+                </a:solidFill>
+                <a:latin typeface="Lato" pitchFamily="34" charset="0"/>
+                <a:ea typeface="Lato" pitchFamily="34" charset="-122"/>
+                <a:cs typeface="Lato" pitchFamily="34" charset="-120"/>
+              </a:rPr>
+              <a:t>лицензионному</a:t>
+            </a:r>
+            <a:r>
+              <a:rPr lang="en-US" sz="1050" dirty="0">
+                <a:solidFill>
+                  <a:srgbClr val="272525"/>
+                </a:solidFill>
+                <a:latin typeface="Lato" pitchFamily="34" charset="0"/>
+                <a:ea typeface="Lato" pitchFamily="34" charset="-122"/>
+                <a:cs typeface="Lato" pitchFamily="34" charset="-120"/>
+              </a:rPr>
+              <a:t> </a:t>
+            </a:r>
+            <a:r>
+              <a:rPr lang="en-US" sz="1050" dirty="0" err="1" smtClean="0">
+                <a:solidFill>
+                  <a:srgbClr val="272525"/>
+                </a:solidFill>
+                <a:latin typeface="Lato" pitchFamily="34" charset="0"/>
+                <a:ea typeface="Lato" pitchFamily="34" charset="-122"/>
+                <a:cs typeface="Lato" pitchFamily="34" charset="-120"/>
+              </a:rPr>
+              <a:t>серверу</a:t>
+            </a:r>
+            <a:r>
+              <a:rPr lang="ru-RU" sz="1050" dirty="0" smtClean="0">
+                <a:solidFill>
+                  <a:srgbClr val="272525"/>
+                </a:solidFill>
+                <a:latin typeface="Lato" pitchFamily="34" charset="0"/>
+                <a:ea typeface="Lato" pitchFamily="34" charset="-122"/>
+                <a:cs typeface="Lato" pitchFamily="34" charset="-120"/>
+              </a:rPr>
+              <a:t>.</a:t>
             </a:r>
             <a:endParaRPr lang="en-US" sz="1050" dirty="0"/>
           </a:p>
@@ -4870,7 +5226,7 @@
           <a:blip r:embed="rId4">
             <a:extLst>
               <a:ext uri="{96DAC541-7B7A-43D3-8B79-37D633B846F1}">
-                <asvg:svgBlip xmlns:asvg="http://schemas.microsoft.com/office/drawing/2016/SVG/main" xmlns="" r:embed="rId5"/>
+                <asvg:svgBlip xmlns="" xmlns:asvg="http://schemas.microsoft.com/office/drawing/2016/SVG/main" r:embed="rId5"/>
               </a:ext>
             </a:extLst>
           </a:blip>
@@ -4968,7 +5324,51 @@
                 <a:ea typeface="Lato" pitchFamily="34" charset="-122"/>
                 <a:cs typeface="Lato" pitchFamily="34" charset="-120"/>
               </a:rPr>
-              <a:t>Генераторы ключей, которые подбирают или имитируют валидные серийные номера</a:t>
+              <a:t>Генераторы ключей, которые подбирают или имитируют валидные </a:t>
+            </a:r>
+            <a:r>
+              <a:rPr lang="en-US" sz="1050" dirty="0" err="1">
+                <a:solidFill>
+                  <a:srgbClr val="272525"/>
+                </a:solidFill>
+                <a:latin typeface="Lato" pitchFamily="34" charset="0"/>
+                <a:ea typeface="Lato" pitchFamily="34" charset="-122"/>
+                <a:cs typeface="Lato" pitchFamily="34" charset="-120"/>
+              </a:rPr>
+              <a:t>серийные</a:t>
+            </a:r>
+            <a:r>
+              <a:rPr lang="en-US" sz="1050" dirty="0">
+                <a:solidFill>
+                  <a:srgbClr val="272525"/>
+                </a:solidFill>
+                <a:latin typeface="Lato" pitchFamily="34" charset="0"/>
+                <a:ea typeface="Lato" pitchFamily="34" charset="-122"/>
+                <a:cs typeface="Lato" pitchFamily="34" charset="-120"/>
+              </a:rPr>
+              <a:t> </a:t>
+            </a:r>
+            <a:r>
+              <a:rPr lang="en-US" sz="1050" dirty="0" err="1" smtClean="0">
+                <a:solidFill>
+                  <a:srgbClr val="272525"/>
+                </a:solidFill>
+                <a:latin typeface="Lato" pitchFamily="34" charset="0"/>
+                <a:ea typeface="Lato" pitchFamily="34" charset="-122"/>
+                <a:cs typeface="Lato" pitchFamily="34" charset="-120"/>
+              </a:rPr>
+              <a:t>номера</a:t>
+            </a:r>
+            <a:r>
+              <a:rPr lang="ru-RU" sz="1050" dirty="0" smtClean="0">
+                <a:solidFill>
+                  <a:srgbClr val="272525"/>
+                </a:solidFill>
+                <a:latin typeface="Lato" pitchFamily="34" charset="0"/>
+                <a:ea typeface="Lato" pitchFamily="34" charset="-122"/>
+                <a:cs typeface="Lato" pitchFamily="34" charset="-120"/>
+              </a:rPr>
+              <a:t>.</a:t>
             </a:r>
             <a:endParaRPr lang="en-US" sz="1050" dirty="0"/>
           </a:p>
@@ -5053,7 +5453,7 @@
           <a:blip r:embed="rId3">
             <a:extLst>
               <a:ext uri="{96DAC541-7B7A-43D3-8B79-37D633B846F1}">
-                <asvg:svgBlip xmlns:asvg="http://schemas.microsoft.com/office/drawing/2016/SVG/main" xmlns="" r:embed="rId4"/>
+                <asvg:svgBlip xmlns="" xmlns:asvg="http://schemas.microsoft.com/office/drawing/2016/SVG/main" r:embed="rId4"/>
               </a:ext>
             </a:extLst>
           </a:blip>
@@ -5151,7 +5551,51 @@
                 <a:ea typeface="Lato" pitchFamily="34" charset="-122"/>
                 <a:cs typeface="Lato" pitchFamily="34" charset="-120"/>
               </a:rPr>
-              <a:t>Склейка легальной программы с вирусом в один файл — антивирус не всегда замечает</a:t>
+              <a:t>Склейка легальной программы с вирусом в один файл — антивирус не </a:t>
+            </a:r>
+            <a:r>
+              <a:rPr lang="en-US" sz="950" dirty="0" err="1">
+                <a:solidFill>
+                  <a:srgbClr val="272525"/>
+                </a:solidFill>
+                <a:latin typeface="Lato" pitchFamily="34" charset="0"/>
+                <a:ea typeface="Lato" pitchFamily="34" charset="-122"/>
+                <a:cs typeface="Lato" pitchFamily="34" charset="-120"/>
+              </a:rPr>
+              <a:t>всегда</a:t>
+            </a:r>
+            <a:r>
+              <a:rPr lang="en-US" sz="950" dirty="0">
+                <a:solidFill>
+                  <a:srgbClr val="272525"/>
+                </a:solidFill>
+                <a:latin typeface="Lato" pitchFamily="34" charset="0"/>
+                <a:ea typeface="Lato" pitchFamily="34" charset="-122"/>
+                <a:cs typeface="Lato" pitchFamily="34" charset="-120"/>
+              </a:rPr>
+              <a:t> </a:t>
+            </a:r>
+            <a:r>
+              <a:rPr lang="en-US" sz="950" dirty="0" err="1" smtClean="0">
+                <a:solidFill>
+                  <a:srgbClr val="272525"/>
+                </a:solidFill>
+                <a:latin typeface="Lato" pitchFamily="34" charset="0"/>
+                <a:ea typeface="Lato" pitchFamily="34" charset="-122"/>
+                <a:cs typeface="Lato" pitchFamily="34" charset="-120"/>
+              </a:rPr>
+              <a:t>замечает</a:t>
+            </a:r>
+            <a:r>
+              <a:rPr lang="ru-RU" sz="950" dirty="0" smtClean="0">
+                <a:solidFill>
+                  <a:srgbClr val="272525"/>
+                </a:solidFill>
+                <a:latin typeface="Lato" pitchFamily="34" charset="0"/>
+                <a:ea typeface="Lato" pitchFamily="34" charset="-122"/>
+                <a:cs typeface="Lato" pitchFamily="34" charset="-120"/>
+              </a:rPr>
+              <a:t>.</a:t>
             </a:r>
             <a:endParaRPr lang="en-US" sz="950" dirty="0"/>
           </a:p>
@@ -5169,7 +5613,7 @@
           <a:blip r:embed="rId3">
             <a:extLst>
               <a:ext uri="{96DAC541-7B7A-43D3-8B79-37D633B846F1}">
-                <asvg:svgBlip xmlns:asvg="http://schemas.microsoft.com/office/drawing/2016/SVG/main" xmlns="" r:embed="rId4"/>
+                <asvg:svgBlip xmlns="" xmlns:asvg="http://schemas.microsoft.com/office/drawing/2016/SVG/main" r:embed="rId4"/>
               </a:ext>
             </a:extLst>
           </a:blip>
@@ -5267,7 +5711,51 @@
                 <a:ea typeface="Lato" pitchFamily="34" charset="-122"/>
                 <a:cs typeface="Lato" pitchFamily="34" charset="-120"/>
               </a:rPr>
-              <a:t>Маленький файл-загрузчик, который после запуска скачивает основной вредонос из интернета</a:t>
+              <a:t>Маленький файл-загрузчик, который после запуска скачивает основной вредонос </a:t>
+            </a:r>
+            <a:r>
+              <a:rPr lang="en-US" sz="950" dirty="0" err="1">
+                <a:solidFill>
+                  <a:srgbClr val="272525"/>
+                </a:solidFill>
+                <a:latin typeface="Lato" pitchFamily="34" charset="0"/>
+                <a:ea typeface="Lato" pitchFamily="34" charset="-122"/>
+                <a:cs typeface="Lato" pitchFamily="34" charset="-120"/>
+              </a:rPr>
+              <a:t>из</a:t>
+            </a:r>
+            <a:r>
+              <a:rPr lang="en-US" sz="950" dirty="0">
+                <a:solidFill>
+                  <a:srgbClr val="272525"/>
+                </a:solidFill>
+                <a:latin typeface="Lato" pitchFamily="34" charset="0"/>
+                <a:ea typeface="Lato" pitchFamily="34" charset="-122"/>
+                <a:cs typeface="Lato" pitchFamily="34" charset="-120"/>
+              </a:rPr>
+              <a:t> </a:t>
+            </a:r>
+            <a:r>
+              <a:rPr lang="en-US" sz="950" dirty="0" err="1" smtClean="0">
+                <a:solidFill>
+                  <a:srgbClr val="272525"/>
+                </a:solidFill>
+                <a:latin typeface="Lato" pitchFamily="34" charset="0"/>
+                <a:ea typeface="Lato" pitchFamily="34" charset="-122"/>
+                <a:cs typeface="Lato" pitchFamily="34" charset="-120"/>
+              </a:rPr>
+              <a:t>интернета</a:t>
+            </a:r>
+            <a:r>
+              <a:rPr lang="ru-RU" sz="950" dirty="0" smtClean="0">
+                <a:solidFill>
+                  <a:srgbClr val="272525"/>
+                </a:solidFill>
+                <a:latin typeface="Lato" pitchFamily="34" charset="0"/>
+                <a:ea typeface="Lato" pitchFamily="34" charset="-122"/>
+                <a:cs typeface="Lato" pitchFamily="34" charset="-120"/>
+              </a:rPr>
+              <a:t>.</a:t>
             </a:r>
             <a:endParaRPr lang="en-US" sz="950" dirty="0"/>
           </a:p>
@@ -5285,7 +5773,7 @@
           <a:blip r:embed="rId3">
             <a:extLst>
               <a:ext uri="{96DAC541-7B7A-43D3-8B79-37D633B846F1}">
-                <asvg:svgBlip xmlns:asvg="http://schemas.microsoft.com/office/drawing/2016/SVG/main" xmlns="" r:embed="rId4"/>
+                <asvg:svgBlip xmlns="" xmlns:asvg="http://schemas.microsoft.com/office/drawing/2016/SVG/main" r:embed="rId4"/>
               </a:ext>
             </a:extLst>
           </a:blip>
@@ -5383,7 +5871,29 @@
                 <a:ea typeface="Lato" pitchFamily="34" charset="-122"/>
                 <a:cs typeface="Lato" pitchFamily="34" charset="-120"/>
               </a:rPr>
-              <a:t>«Отключите антивирус перед установкой» — классическая просьба в инструкциях к крякам</a:t>
+              <a:t>«Отключите антивирус перед установкой» — классическая просьба в инструкциях к </a:t>
+            </a:r>
+            <a:r>
+              <a:rPr lang="en-US" sz="950" dirty="0" err="1" smtClean="0">
+                <a:solidFill>
+                  <a:srgbClr val="272525"/>
+                </a:solidFill>
+                <a:latin typeface="Lato" pitchFamily="34" charset="0"/>
+                <a:ea typeface="Lato" pitchFamily="34" charset="-122"/>
+                <a:cs typeface="Lato" pitchFamily="34" charset="-120"/>
+              </a:rPr>
+              <a:t>крякам</a:t>
+            </a:r>
+            <a:r>
+              <a:rPr lang="ru-RU" sz="950" dirty="0" smtClean="0">
+                <a:solidFill>
+                  <a:srgbClr val="272525"/>
+                </a:solidFill>
+                <a:latin typeface="Lato" pitchFamily="34" charset="0"/>
+                <a:ea typeface="Lato" pitchFamily="34" charset="-122"/>
+                <a:cs typeface="Lato" pitchFamily="34" charset="-120"/>
+              </a:rPr>
+              <a:t>.</a:t>
             </a:r>
             <a:endParaRPr lang="en-US" sz="950" dirty="0"/>
           </a:p>
@@ -6050,6 +6560,83 @@
               <a:buNone/>
             </a:pPr>
             <a:r>
+              <a:rPr lang="en-US" sz="1100" dirty="0" err="1" smtClean="0">
+                <a:solidFill>
+                  <a:srgbClr val="272525"/>
+                </a:solidFill>
+                <a:latin typeface="Lato" pitchFamily="34" charset="0"/>
+                <a:ea typeface="Lato" pitchFamily="34" charset="-122"/>
+                <a:cs typeface="Lato" pitchFamily="34" charset="-120"/>
+              </a:rPr>
+              <a:t>Вредонос</a:t>
+            </a:r>
+            <a:r>
+              <a:rPr lang="ru-RU" sz="1100" dirty="0" err="1" smtClean="0">
+                <a:solidFill>
+                  <a:srgbClr val="272525"/>
+                </a:solidFill>
+                <a:latin typeface="Lato" pitchFamily="34" charset="0"/>
+                <a:ea typeface="Lato" pitchFamily="34" charset="-122"/>
+                <a:cs typeface="Lato" pitchFamily="34" charset="-120"/>
+              </a:rPr>
+              <a:t>ная</a:t>
+            </a:r>
+            <a:r>
+              <a:rPr lang="ru-RU" sz="1100" dirty="0" smtClean="0">
+                <a:solidFill>
+                  <a:srgbClr val="272525"/>
+                </a:solidFill>
+                <a:latin typeface="Lato" pitchFamily="34" charset="0"/>
+                <a:ea typeface="Lato" pitchFamily="34" charset="-122"/>
+                <a:cs typeface="Lato" pitchFamily="34" charset="-120"/>
+              </a:rPr>
+              <a:t> программа</a:t>
+            </a:r>
+            <a:r>
+              <a:rPr lang="en-US" sz="1100" dirty="0" smtClean="0">
+                <a:solidFill>
+                  <a:srgbClr val="272525"/>
+                </a:solidFill>
+                <a:latin typeface="Lato" pitchFamily="34" charset="0"/>
+                <a:ea typeface="Lato" pitchFamily="34" charset="-122"/>
+                <a:cs typeface="Lato" pitchFamily="34" charset="-120"/>
+              </a:rPr>
+              <a:t> </a:t>
+            </a:r>
+            <a:r>
+              <a:rPr lang="en-US" sz="1100" dirty="0" err="1" smtClean="0">
+                <a:solidFill>
+                  <a:srgbClr val="272525"/>
+                </a:solidFill>
+                <a:latin typeface="Lato" pitchFamily="34" charset="0"/>
+                <a:ea typeface="Lato" pitchFamily="34" charset="-122"/>
+                <a:cs typeface="Lato" pitchFamily="34" charset="-120"/>
+              </a:rPr>
+              <a:t>изменил</a:t>
+            </a:r>
+            <a:r>
+              <a:rPr lang="ru-RU" sz="1100" dirty="0" smtClean="0">
+                <a:solidFill>
+                  <a:srgbClr val="272525"/>
+                </a:solidFill>
+                <a:latin typeface="Lato" pitchFamily="34" charset="0"/>
+                <a:ea typeface="Lato" pitchFamily="34" charset="-122"/>
+                <a:cs typeface="Lato" pitchFamily="34" charset="-120"/>
+              </a:rPr>
+              <a:t>а</a:t>
+            </a:r>
+            <a:r>
+              <a:rPr lang="en-US" sz="1100" dirty="0" smtClean="0">
+                <a:solidFill>
+                  <a:srgbClr val="272525"/>
+                </a:solidFill>
+                <a:latin typeface="Lato" pitchFamily="34" charset="0"/>
+                <a:ea typeface="Lato" pitchFamily="34" charset="-122"/>
+                <a:cs typeface="Lato" pitchFamily="34" charset="-120"/>
+              </a:rPr>
+              <a:t> </a:t>
+            </a:r>
+            <a:r>
               <a:rPr lang="en-US" sz="1100" dirty="0">
                 <a:solidFill>
                   <a:srgbClr val="272525"/>
@@ -6058,7 +6645,7 @@
                 <a:ea typeface="Lato" pitchFamily="34" charset="-122"/>
                 <a:cs typeface="Lato" pitchFamily="34" charset="-120"/>
               </a:rPr>
-              <a:t>Вредонос изменил права доступа NTFS на папку — пользователь потерял контроль над своими файлами, хотя данные не были зашифрованы</a:t>
+              <a:t>права доступа NTFS на папку — пользователь потерял контроль над своими файлами, хотя данные не были зашифрованы</a:t>
             </a:r>
             <a:endParaRPr lang="en-US" sz="1100" dirty="0"/>
           </a:p>
@@ -6129,7 +6716,7 @@
         </p:spPr>
         <p:txBody>
           <a:bodyPr wrap="square" lIns="0" tIns="0" rIns="0" bIns="0" rtlCol="0" anchor="t">
-            <a:normAutofit/>
+            <a:normAutofit fontScale="92500"/>
           </a:bodyPr>
           <a:lstStyle/>
           <a:p>
@@ -6140,6 +6727,39 @@
               <a:buNone/>
             </a:pPr>
             <a:r>
+              <a:rPr lang="ru-RU" sz="1100" dirty="0" smtClean="0">
+                <a:solidFill>
+                  <a:srgbClr val="000000"/>
+                </a:solidFill>
+                <a:latin typeface="Lato" pitchFamily="34" charset="0"/>
+                <a:ea typeface="Lato" pitchFamily="34" charset="-122"/>
+                <a:cs typeface="Lato" pitchFamily="34" charset="-120"/>
+              </a:rPr>
+              <a:t>Вредоносная программа имитировала шифрование </a:t>
+            </a:r>
+            <a:r>
+              <a:rPr lang="en-US" sz="1100" dirty="0" smtClean="0">
+                <a:solidFill>
+                  <a:srgbClr val="000000"/>
+                </a:solidFill>
+                <a:latin typeface="Lato" pitchFamily="34" charset="0"/>
+                <a:ea typeface="Lato" pitchFamily="34" charset="-122"/>
+                <a:cs typeface="Lato" pitchFamily="34" charset="-120"/>
+              </a:rPr>
+              <a:t>— </a:t>
+            </a:r>
+            <a:r>
+              <a:rPr lang="en-US" sz="1100" dirty="0" err="1">
+                <a:solidFill>
+                  <a:srgbClr val="000000"/>
+                </a:solidFill>
+                <a:latin typeface="Lato" pitchFamily="34" charset="0"/>
+                <a:ea typeface="Lato" pitchFamily="34" charset="-122"/>
+                <a:cs typeface="Lato" pitchFamily="34" charset="-120"/>
+              </a:rPr>
+              <a:t>файлы</a:t>
+            </a:r>
+            <a:r>
               <a:rPr lang="en-US" sz="1100" dirty="0">
                 <a:solidFill>
                   <a:srgbClr val="000000"/>
@@ -6148,7 +6768,73 @@
                 <a:ea typeface="Lato" pitchFamily="34" charset="-122"/>
                 <a:cs typeface="Lato" pitchFamily="34" charset="-120"/>
               </a:rPr>
-              <a:t>Это не настоящий ransomware — файлы целы, нужно только вернуть права</a:t>
+              <a:t> </a:t>
+            </a:r>
+            <a:r>
+              <a:rPr lang="ru-RU" sz="1100" dirty="0" smtClean="0">
+                <a:solidFill>
+                  <a:srgbClr val="000000"/>
+                </a:solidFill>
+                <a:latin typeface="Lato" pitchFamily="34" charset="0"/>
+                <a:ea typeface="Lato" pitchFamily="34" charset="-122"/>
+                <a:cs typeface="Lato" pitchFamily="34" charset="-120"/>
+              </a:rPr>
+              <a:t>не повреждены</a:t>
+            </a:r>
+            <a:r>
+              <a:rPr lang="en-US" sz="1100" dirty="0" smtClean="0">
+                <a:solidFill>
+                  <a:srgbClr val="000000"/>
+                </a:solidFill>
+                <a:latin typeface="Lato" pitchFamily="34" charset="0"/>
+                <a:ea typeface="Lato" pitchFamily="34" charset="-122"/>
+                <a:cs typeface="Lato" pitchFamily="34" charset="-120"/>
+              </a:rPr>
+              <a:t>, </a:t>
+            </a:r>
+            <a:r>
+              <a:rPr lang="ru-RU" sz="1100" dirty="0" smtClean="0">
+                <a:solidFill>
+                  <a:srgbClr val="000000"/>
+                </a:solidFill>
+                <a:latin typeface="Lato" pitchFamily="34" charset="0"/>
+                <a:ea typeface="Lato" pitchFamily="34" charset="-122"/>
+                <a:cs typeface="Lato" pitchFamily="34" charset="-120"/>
+              </a:rPr>
+              <a:t>достаточно восстановить</a:t>
+            </a:r>
+            <a:r>
+              <a:rPr lang="en-US" sz="1100" dirty="0" smtClean="0">
+                <a:solidFill>
+                  <a:srgbClr val="000000"/>
+                </a:solidFill>
+                <a:latin typeface="Lato" pitchFamily="34" charset="0"/>
+                <a:ea typeface="Lato" pitchFamily="34" charset="-122"/>
+                <a:cs typeface="Lato" pitchFamily="34" charset="-120"/>
+              </a:rPr>
+              <a:t> </a:t>
+            </a:r>
+            <a:r>
+              <a:rPr lang="en-US" sz="1100" dirty="0" err="1" smtClean="0">
+                <a:solidFill>
+                  <a:srgbClr val="000000"/>
+                </a:solidFill>
+                <a:latin typeface="Lato" pitchFamily="34" charset="0"/>
+                <a:ea typeface="Lato" pitchFamily="34" charset="-122"/>
+                <a:cs typeface="Lato" pitchFamily="34" charset="-120"/>
+              </a:rPr>
+              <a:t>права</a:t>
+            </a:r>
+            <a:r>
+              <a:rPr lang="ru-RU" sz="1100" dirty="0" smtClean="0">
+                <a:solidFill>
+                  <a:srgbClr val="000000"/>
+                </a:solidFill>
+                <a:latin typeface="Lato" pitchFamily="34" charset="0"/>
+                <a:ea typeface="Lato" pitchFamily="34" charset="-122"/>
+                <a:cs typeface="Lato" pitchFamily="34" charset="-120"/>
+              </a:rPr>
+              <a:t>.</a:t>
             </a:r>
             <a:endParaRPr lang="en-US" sz="1100" dirty="0"/>
           </a:p>
@@ -6698,7 +7384,7 @@
   <a:extraClrSchemeLst/>
   <a:extLst>
     <a:ext uri="{05A4C25C-085E-4340-85A3-A5531E510DB2}">
-      <thm15:themeFamily xmlns:thm15="http://schemas.microsoft.com/office/thememl/2012/main" xmlns="" name="Office Theme" id="{62F939B6-93AF-4DB8-9C6B-D6C7DFDC589F}" vid="{4A3C46E8-61CC-4603-A589-7422A47A8E4A}"/>
+      <thm15:themeFamily xmlns="" xmlns:thm15="http://schemas.microsoft.com/office/thememl/2012/main" name="Office Theme" id="{62F939B6-93AF-4DB8-9C6B-D6C7DFDC589F}" vid="{4A3C46E8-61CC-4603-A589-7422A47A8E4A}"/>
     </a:ext>
   </a:extLst>
 </a:theme>
